--- a/Web/JavaEE.pptx
+++ b/Web/JavaEE.pptx
@@ -5,10 +5,10 @@
     <p:sldMasterId id="2147483648" r:id="rId1"/>
   </p:sldMasterIdLst>
   <p:notesMasterIdLst>
-    <p:notesMasterId r:id="rId27"/>
+    <p:notesMasterId r:id="rId28"/>
   </p:notesMasterIdLst>
   <p:handoutMasterIdLst>
-    <p:handoutMasterId r:id="rId28"/>
+    <p:handoutMasterId r:id="rId29"/>
   </p:handoutMasterIdLst>
   <p:sldIdLst>
     <p:sldId id="409" r:id="rId3"/>
@@ -30,16 +30,17 @@
     <p:sldId id="424" r:id="rId19"/>
     <p:sldId id="423" r:id="rId20"/>
     <p:sldId id="467" r:id="rId21"/>
-    <p:sldId id="428" r:id="rId22"/>
-    <p:sldId id="429" r:id="rId23"/>
-    <p:sldId id="455" r:id="rId24"/>
-    <p:sldId id="430" r:id="rId25"/>
-    <p:sldId id="472" r:id="rId26"/>
+    <p:sldId id="473" r:id="rId22"/>
+    <p:sldId id="428" r:id="rId23"/>
+    <p:sldId id="429" r:id="rId24"/>
+    <p:sldId id="455" r:id="rId25"/>
+    <p:sldId id="430" r:id="rId26"/>
+    <p:sldId id="472" r:id="rId27"/>
   </p:sldIdLst>
   <p:sldSz cx="12192000" cy="6858000"/>
   <p:notesSz cx="6858000" cy="9144000"/>
   <p:custDataLst>
-    <p:tags r:id="rId33"/>
+    <p:tags r:id="rId34"/>
   </p:custDataLst>
   <p:defaultTextStyle>
     <a:defPPr>
@@ -5124,7 +5125,7 @@
           <a:p>
             <a:r>
               <a:rPr lang="en-US" altLang="zh-CN"/>
-              <a:t>MyBatis Plus</a:t>
+              <a:t>MyBatis Plus - Overview</a:t>
             </a:r>
             <a:endParaRPr lang="en-US" altLang="zh-CN"/>
           </a:p>
@@ -5164,6 +5165,22 @@
             <a:endParaRPr lang="en-US" altLang="zh-CN" sz="1500"/>
           </a:p>
           <a:p>
+            <a:pPr lvl="1"/>
+            <a:r>
+              <a:rPr lang="en-US" altLang="zh-CN" sz="1500"/>
+              <a:t>https://www.hxstrive.com/subject/mybatis_plus/256.htm</a:t>
+            </a:r>
+            <a:endParaRPr lang="en-US" altLang="zh-CN" sz="1500"/>
+          </a:p>
+          <a:p>
+            <a:pPr lvl="1"/>
+            <a:r>
+              <a:rPr lang="en-US" altLang="zh-CN" sz="1500"/>
+              <a:t>https://baomidou.com/guides/data-interface/</a:t>
+            </a:r>
+            <a:endParaRPr lang="en-US" altLang="zh-CN" sz="1500"/>
+          </a:p>
+          <a:p>
             <a:r>
               <a:rPr lang="en-US" altLang="zh-CN" sz="1800"/>
               <a:t>Features</a:t>
@@ -5185,6 +5202,14 @@
               <a:t>强大的 CRUD 操作：内置通用 Mapper、通用 Service，仅仅通过少量配置即可实现单表大部分 CRUD 操作，更有强大的条件构造器，满足各类使用需求</a:t>
             </a:r>
             <a:endParaRPr lang="en-US" altLang="zh-CN" sz="1600"/>
+          </a:p>
+          <a:p>
+            <a:pPr lvl="2"/>
+            <a:r>
+              <a:rPr lang="zh-CN" altLang="en-US" sz="1440"/>
+              <a:t>获取数据列表</a:t>
+            </a:r>
+            <a:endParaRPr lang="en-US" altLang="zh-CN" sz="1440"/>
           </a:p>
           <a:p>
             <a:pPr lvl="1"/>
@@ -5566,7 +5591,7 @@
       <p:grpSpPr/>
       <p:sp>
         <p:nvSpPr>
-          <p:cNvPr id="4" name="标题 3"/>
+          <p:cNvPr id="2" name="标题 1"/>
           <p:cNvSpPr>
             <a:spLocks noGrp="1"/>
           </p:cNvSpPr>
@@ -5579,28 +5604,302 @@
           <a:bodyPr/>
           <a:p>
             <a:r>
-              <a:rPr lang="en-US" altLang="zh-CN"/>
-              <a:t>Misc</a:t>
-            </a:r>
-            <a:endParaRPr lang="en-US" altLang="zh-CN"/>
-          </a:p>
-        </p:txBody>
-      </p:sp>
-      <p:sp>
-        <p:nvSpPr>
-          <p:cNvPr id="5" name="文本占位符 4"/>
-          <p:cNvSpPr>
-            <a:spLocks noGrp="1"/>
-          </p:cNvSpPr>
-          <p:nvPr>
-            <p:ph type="body" idx="1"/>
-          </p:nvPr>
-        </p:nvSpPr>
-        <p:spPr/>
+              <a:rPr lang="en-US" altLang="zh-CN">
+                <a:sym typeface="+mn-ea"/>
+              </a:rPr>
+              <a:t>MyBatis Plus - Service CRUD</a:t>
+            </a:r>
+            <a:endParaRPr lang="zh-CN" altLang="en-US"/>
+          </a:p>
+        </p:txBody>
+      </p:sp>
+      <p:sp>
+        <p:nvSpPr>
+          <p:cNvPr id="3" name="内容占位符 2"/>
+          <p:cNvSpPr>
+            <a:spLocks noGrp="1"/>
+          </p:cNvSpPr>
+          <p:nvPr>
+            <p:ph idx="1"/>
+          </p:nvPr>
+        </p:nvSpPr>
+        <p:spPr>
+          <a:xfrm>
+            <a:off x="838200" y="1211580"/>
+            <a:ext cx="3026410" cy="4549140"/>
+          </a:xfrm>
+        </p:spPr>
         <p:txBody>
           <a:bodyPr/>
           <a:p>
-            <a:endParaRPr lang="zh-CN" altLang="en-US"/>
+            <a:r>
+              <a:rPr lang="en-US" altLang="zh-CN"/>
+              <a:t>Functions</a:t>
+            </a:r>
+            <a:endParaRPr lang="en-US" altLang="zh-CN"/>
+          </a:p>
+          <a:p>
+            <a:pPr lvl="1"/>
+            <a:r>
+              <a:rPr lang="en-US" altLang="zh-CN"/>
+              <a:t>get single one</a:t>
+            </a:r>
+            <a:endParaRPr lang="en-US" altLang="zh-CN"/>
+          </a:p>
+          <a:p>
+            <a:pPr lvl="1"/>
+            <a:r>
+              <a:rPr lang="en-US" altLang="zh-CN"/>
+              <a:t>get list</a:t>
+            </a:r>
+            <a:endParaRPr lang="en-US" altLang="zh-CN"/>
+          </a:p>
+        </p:txBody>
+      </p:sp>
+      <p:sp>
+        <p:nvSpPr>
+          <p:cNvPr id="4" name="文本框 3"/>
+          <p:cNvSpPr txBox="1"/>
+          <p:nvPr/>
+        </p:nvSpPr>
+        <p:spPr>
+          <a:xfrm>
+            <a:off x="4074160" y="1129030"/>
+            <a:ext cx="4387215" cy="4338320"/>
+          </a:xfrm>
+          <a:prstGeom prst="rect">
+            <a:avLst/>
+          </a:prstGeom>
+          <a:noFill/>
+          <a:ln>
+            <a:solidFill>
+              <a:srgbClr val="C00000"/>
+            </a:solidFill>
+          </a:ln>
+        </p:spPr>
+        <p:txBody>
+          <a:bodyPr wrap="square" rtlCol="0">
+            <a:spAutoFit/>
+          </a:bodyPr>
+          <a:p>
+            <a:r>
+              <a:rPr lang="en-US" altLang="zh-CN" sz="1200">
+                <a:sym typeface="+mn-ea"/>
+              </a:rPr>
+              <a:t>// 查询所有</a:t>
+            </a:r>
+            <a:endParaRPr lang="en-US" altLang="zh-CN" sz="1200">
+              <a:sym typeface="+mn-ea"/>
+            </a:endParaRPr>
+          </a:p>
+          <a:p>
+            <a:r>
+              <a:rPr lang="en-US" altLang="zh-CN" sz="1200">
+                <a:sym typeface="+mn-ea"/>
+              </a:rPr>
+              <a:t>List&lt;T&gt; list();</a:t>
+            </a:r>
+            <a:endParaRPr lang="en-US" altLang="zh-CN" sz="1200">
+              <a:sym typeface="+mn-ea"/>
+            </a:endParaRPr>
+          </a:p>
+          <a:p>
+            <a:r>
+              <a:rPr lang="en-US" altLang="zh-CN" sz="1200">
+                <a:sym typeface="+mn-ea"/>
+              </a:rPr>
+              <a:t>// 查询列表</a:t>
+            </a:r>
+            <a:endParaRPr lang="en-US" altLang="zh-CN" sz="1200">
+              <a:sym typeface="+mn-ea"/>
+            </a:endParaRPr>
+          </a:p>
+          <a:p>
+            <a:r>
+              <a:rPr lang="en-US" altLang="zh-CN" sz="1200">
+                <a:sym typeface="+mn-ea"/>
+              </a:rPr>
+              <a:t>List&lt;T&gt; list(Wrapper&lt;T&gt; queryWrapper);</a:t>
+            </a:r>
+            <a:endParaRPr lang="en-US" altLang="zh-CN" sz="1200">
+              <a:sym typeface="+mn-ea"/>
+            </a:endParaRPr>
+          </a:p>
+          <a:p>
+            <a:r>
+              <a:rPr lang="en-US" altLang="zh-CN" sz="1200">
+                <a:sym typeface="+mn-ea"/>
+              </a:rPr>
+              <a:t>// 查询（根据ID 批量查询）</a:t>
+            </a:r>
+            <a:endParaRPr lang="en-US" altLang="zh-CN" sz="1200">
+              <a:sym typeface="+mn-ea"/>
+            </a:endParaRPr>
+          </a:p>
+          <a:p>
+            <a:r>
+              <a:rPr lang="en-US" altLang="zh-CN" sz="1200">
+                <a:sym typeface="+mn-ea"/>
+              </a:rPr>
+              <a:t>Collection&lt;T&gt; listByIds(Collection&lt;? extends Serializable&gt; idList);</a:t>
+            </a:r>
+            <a:endParaRPr lang="en-US" altLang="zh-CN" sz="1200">
+              <a:sym typeface="+mn-ea"/>
+            </a:endParaRPr>
+          </a:p>
+          <a:p>
+            <a:r>
+              <a:rPr lang="en-US" altLang="zh-CN" sz="1200">
+                <a:sym typeface="+mn-ea"/>
+              </a:rPr>
+              <a:t>// 查询（根据 columnMap 条件）</a:t>
+            </a:r>
+            <a:endParaRPr lang="en-US" altLang="zh-CN" sz="1200">
+              <a:sym typeface="+mn-ea"/>
+            </a:endParaRPr>
+          </a:p>
+          <a:p>
+            <a:r>
+              <a:rPr lang="en-US" altLang="zh-CN" sz="1200">
+                <a:sym typeface="+mn-ea"/>
+              </a:rPr>
+              <a:t>Collection&lt;T&gt; listByMap(Map&lt;String, Object&gt; columnMap);</a:t>
+            </a:r>
+            <a:endParaRPr lang="en-US" altLang="zh-CN" sz="1200">
+              <a:sym typeface="+mn-ea"/>
+            </a:endParaRPr>
+          </a:p>
+          <a:p>
+            <a:r>
+              <a:rPr lang="en-US" altLang="zh-CN" sz="1200">
+                <a:sym typeface="+mn-ea"/>
+              </a:rPr>
+              <a:t>// 查询所有列表</a:t>
+            </a:r>
+            <a:endParaRPr lang="en-US" altLang="zh-CN" sz="1200">
+              <a:sym typeface="+mn-ea"/>
+            </a:endParaRPr>
+          </a:p>
+          <a:p>
+            <a:r>
+              <a:rPr lang="en-US" altLang="zh-CN" sz="1200">
+                <a:sym typeface="+mn-ea"/>
+              </a:rPr>
+              <a:t>List&lt;Map&lt;String, Object&gt;&gt; listMaps();</a:t>
+            </a:r>
+            <a:endParaRPr lang="en-US" altLang="zh-CN" sz="1200">
+              <a:sym typeface="+mn-ea"/>
+            </a:endParaRPr>
+          </a:p>
+          <a:p>
+            <a:r>
+              <a:rPr lang="en-US" altLang="zh-CN" sz="1200">
+                <a:sym typeface="+mn-ea"/>
+              </a:rPr>
+              <a:t>// 查询列表</a:t>
+            </a:r>
+            <a:endParaRPr lang="en-US" altLang="zh-CN" sz="1200">
+              <a:sym typeface="+mn-ea"/>
+            </a:endParaRPr>
+          </a:p>
+          <a:p>
+            <a:r>
+              <a:rPr lang="en-US" altLang="zh-CN" sz="1200">
+                <a:sym typeface="+mn-ea"/>
+              </a:rPr>
+              <a:t>List&lt;Map&lt;String, Object&gt;&gt; listMaps(Wrapper&lt;T&gt; queryWrapper);</a:t>
+            </a:r>
+            <a:endParaRPr lang="en-US" altLang="zh-CN" sz="1200">
+              <a:sym typeface="+mn-ea"/>
+            </a:endParaRPr>
+          </a:p>
+          <a:p>
+            <a:r>
+              <a:rPr lang="en-US" altLang="zh-CN" sz="1200">
+                <a:sym typeface="+mn-ea"/>
+              </a:rPr>
+              <a:t>// 查询全部记录</a:t>
+            </a:r>
+            <a:endParaRPr lang="en-US" altLang="zh-CN" sz="1200">
+              <a:sym typeface="+mn-ea"/>
+            </a:endParaRPr>
+          </a:p>
+          <a:p>
+            <a:r>
+              <a:rPr lang="en-US" altLang="zh-CN" sz="1200">
+                <a:sym typeface="+mn-ea"/>
+              </a:rPr>
+              <a:t>List&lt;Object&gt; listObjs();</a:t>
+            </a:r>
+            <a:endParaRPr lang="en-US" altLang="zh-CN" sz="1200">
+              <a:sym typeface="+mn-ea"/>
+            </a:endParaRPr>
+          </a:p>
+          <a:p>
+            <a:r>
+              <a:rPr lang="en-US" altLang="zh-CN" sz="1200">
+                <a:sym typeface="+mn-ea"/>
+              </a:rPr>
+              <a:t>// 查询全部记录</a:t>
+            </a:r>
+            <a:endParaRPr lang="en-US" altLang="zh-CN" sz="1200">
+              <a:sym typeface="+mn-ea"/>
+            </a:endParaRPr>
+          </a:p>
+          <a:p>
+            <a:r>
+              <a:rPr lang="en-US" altLang="zh-CN" sz="1200">
+                <a:sym typeface="+mn-ea"/>
+              </a:rPr>
+              <a:t>&lt;V&gt; List&lt;V&gt; listObjs(Function&lt;? super Object, V&gt; mapper);</a:t>
+            </a:r>
+            <a:endParaRPr lang="en-US" altLang="zh-CN" sz="1200">
+              <a:sym typeface="+mn-ea"/>
+            </a:endParaRPr>
+          </a:p>
+          <a:p>
+            <a:r>
+              <a:rPr lang="en-US" altLang="zh-CN" sz="1200">
+                <a:sym typeface="+mn-ea"/>
+              </a:rPr>
+              <a:t>// 根据 Wrapper 条件，查询全部记录</a:t>
+            </a:r>
+            <a:endParaRPr lang="en-US" altLang="zh-CN" sz="1200">
+              <a:sym typeface="+mn-ea"/>
+            </a:endParaRPr>
+          </a:p>
+          <a:p>
+            <a:r>
+              <a:rPr lang="en-US" altLang="zh-CN" sz="1200">
+                <a:sym typeface="+mn-ea"/>
+              </a:rPr>
+              <a:t>List&lt;Object&gt; listObjs(Wrapper&lt;T&gt; queryWrapper);</a:t>
+            </a:r>
+            <a:endParaRPr lang="en-US" altLang="zh-CN" sz="1200">
+              <a:sym typeface="+mn-ea"/>
+            </a:endParaRPr>
+          </a:p>
+          <a:p>
+            <a:r>
+              <a:rPr lang="en-US" altLang="zh-CN" sz="1200">
+                <a:sym typeface="+mn-ea"/>
+              </a:rPr>
+              <a:t>// 根据 Wrapper 条件，查询全部记录</a:t>
+            </a:r>
+            <a:endParaRPr lang="en-US" altLang="zh-CN" sz="1200">
+              <a:sym typeface="+mn-ea"/>
+            </a:endParaRPr>
+          </a:p>
+          <a:p>
+            <a:r>
+              <a:rPr lang="en-US" altLang="zh-CN" sz="1200">
+                <a:sym typeface="+mn-ea"/>
+              </a:rPr>
+              <a:t>&lt;V&gt; List&lt;V&gt; listObjs(Wrapper&lt;T&gt; queryWrapper, Function&lt;? super Object, V&gt; mapper);</a:t>
+            </a:r>
+            <a:endParaRPr lang="en-US" altLang="zh-CN" sz="1200">
+              <a:sym typeface="+mn-ea"/>
+            </a:endParaRPr>
           </a:p>
         </p:txBody>
       </p:sp>
@@ -5641,78 +5940,27 @@
           <a:p>
             <a:r>
               <a:rPr lang="en-US" altLang="zh-CN"/>
-              <a:t>Base64</a:t>
-            </a:r>
-            <a:endParaRPr lang="en-US" altLang="zh-CN"/>
-          </a:p>
-        </p:txBody>
-      </p:sp>
-      <p:sp>
-        <p:nvSpPr>
-          <p:cNvPr id="5" name="内容占位符 4"/>
-          <p:cNvSpPr>
-            <a:spLocks noGrp="1"/>
-          </p:cNvSpPr>
-          <p:nvPr>
-            <p:ph idx="1"/>
+              <a:t>Misc</a:t>
+            </a:r>
+            <a:endParaRPr lang="en-US" altLang="zh-CN"/>
+          </a:p>
+        </p:txBody>
+      </p:sp>
+      <p:sp>
+        <p:nvSpPr>
+          <p:cNvPr id="5" name="文本占位符 4"/>
+          <p:cNvSpPr>
+            <a:spLocks noGrp="1"/>
+          </p:cNvSpPr>
+          <p:nvPr>
+            <p:ph type="body" idx="1"/>
           </p:nvPr>
         </p:nvSpPr>
         <p:spPr/>
         <p:txBody>
           <a:bodyPr/>
           <a:p>
-            <a:r>
-              <a:rPr lang="zh-CN" altLang="en-US"/>
-              <a:t>java.util.Base64</a:t>
-            </a:r>
             <a:endParaRPr lang="zh-CN" altLang="en-US"/>
-          </a:p>
-          <a:p>
-            <a:r>
-              <a:rPr lang="en-US" altLang="zh-CN"/>
-              <a:t>encoding</a:t>
-            </a:r>
-            <a:endParaRPr lang="en-US" altLang="zh-CN"/>
-          </a:p>
-          <a:p>
-            <a:pPr lvl="1"/>
-            <a:r>
-              <a:rPr lang="en-US" altLang="zh-CN"/>
-              <a:t>String originalInput = "test input";</a:t>
-            </a:r>
-            <a:endParaRPr lang="en-US" altLang="zh-CN"/>
-          </a:p>
-          <a:p>
-            <a:pPr lvl="1"/>
-            <a:r>
-              <a:rPr lang="en-US" altLang="zh-CN"/>
-              <a:t>String encodedString = Base64.getEncoder().encodeToString(originalInput.getBytes());</a:t>
-            </a:r>
-            <a:endParaRPr lang="en-US" altLang="zh-CN"/>
-          </a:p>
-          <a:p>
-            <a:pPr lvl="0"/>
-            <a:r>
-              <a:rPr lang="en-US" altLang="zh-CN"/>
-              <a:t>decoding</a:t>
-            </a:r>
-            <a:endParaRPr lang="en-US" altLang="zh-CN"/>
-          </a:p>
-          <a:p>
-            <a:pPr lvl="1"/>
-            <a:r>
-              <a:rPr lang="en-US" altLang="zh-CN"/>
-              <a:t>byte[] decodedBytes = Base64.getDecoder().decode(encodedString);</a:t>
-            </a:r>
-            <a:endParaRPr lang="en-US" altLang="zh-CN"/>
-          </a:p>
-          <a:p>
-            <a:pPr lvl="1"/>
-            <a:r>
-              <a:rPr lang="en-US" altLang="zh-CN"/>
-              <a:t>String decodedString = new String(decodedBytes);</a:t>
-            </a:r>
-            <a:endParaRPr lang="en-US" altLang="zh-CN"/>
           </a:p>
         </p:txBody>
       </p:sp>
@@ -5739,7 +5987,7 @@
       <p:grpSpPr/>
       <p:sp>
         <p:nvSpPr>
-          <p:cNvPr id="2" name="标题 1"/>
+          <p:cNvPr id="4" name="标题 3"/>
           <p:cNvSpPr>
             <a:spLocks noGrp="1"/>
           </p:cNvSpPr>
@@ -5753,15 +6001,15 @@
           <a:p>
             <a:r>
               <a:rPr lang="en-US" altLang="zh-CN"/>
-              <a:t>Properties</a:t>
-            </a:r>
-            <a:endParaRPr lang="en-US" altLang="zh-CN"/>
-          </a:p>
-        </p:txBody>
-      </p:sp>
-      <p:sp>
-        <p:nvSpPr>
-          <p:cNvPr id="3" name="内容占位符 2"/>
+              <a:t>Base64</a:t>
+            </a:r>
+            <a:endParaRPr lang="en-US" altLang="zh-CN"/>
+          </a:p>
+        </p:txBody>
+      </p:sp>
+      <p:sp>
+        <p:nvSpPr>
+          <p:cNvPr id="5" name="内容占位符 4"/>
           <p:cNvSpPr>
             <a:spLocks noGrp="1"/>
           </p:cNvSpPr>
@@ -5774,8 +6022,15 @@
           <a:bodyPr/>
           <a:p>
             <a:r>
-              <a:rPr lang="en-US" altLang="zh-CN"/>
-              <a:t>References</a:t>
+              <a:rPr lang="zh-CN" altLang="en-US"/>
+              <a:t>java.util.Base64</a:t>
+            </a:r>
+            <a:endParaRPr lang="zh-CN" altLang="en-US"/>
+          </a:p>
+          <a:p>
+            <a:r>
+              <a:rPr lang="en-US" altLang="zh-CN"/>
+              <a:t>encoding</a:t>
             </a:r>
             <a:endParaRPr lang="en-US" altLang="zh-CN"/>
           </a:p>
@@ -5783,7 +6038,39 @@
             <a:pPr lvl="1"/>
             <a:r>
               <a:rPr lang="en-US" altLang="zh-CN"/>
-              <a:t>https://javapointers.com/how-to/how-to-load-properties-using-apache-commons-configuration-2/</a:t>
+              <a:t>String originalInput = "test input";</a:t>
+            </a:r>
+            <a:endParaRPr lang="en-US" altLang="zh-CN"/>
+          </a:p>
+          <a:p>
+            <a:pPr lvl="1"/>
+            <a:r>
+              <a:rPr lang="en-US" altLang="zh-CN"/>
+              <a:t>String encodedString = Base64.getEncoder().encodeToString(originalInput.getBytes());</a:t>
+            </a:r>
+            <a:endParaRPr lang="en-US" altLang="zh-CN"/>
+          </a:p>
+          <a:p>
+            <a:pPr lvl="0"/>
+            <a:r>
+              <a:rPr lang="en-US" altLang="zh-CN"/>
+              <a:t>decoding</a:t>
+            </a:r>
+            <a:endParaRPr lang="en-US" altLang="zh-CN"/>
+          </a:p>
+          <a:p>
+            <a:pPr lvl="1"/>
+            <a:r>
+              <a:rPr lang="en-US" altLang="zh-CN"/>
+              <a:t>byte[] decodedBytes = Base64.getDecoder().decode(encodedString);</a:t>
+            </a:r>
+            <a:endParaRPr lang="en-US" altLang="zh-CN"/>
+          </a:p>
+          <a:p>
+            <a:pPr lvl="1"/>
+            <a:r>
+              <a:rPr lang="en-US" altLang="zh-CN"/>
+              <a:t>String decodedString = new String(decodedBytes);</a:t>
             </a:r>
             <a:endParaRPr lang="en-US" altLang="zh-CN"/>
           </a:p>
@@ -5826,7 +6113,7 @@
           <a:p>
             <a:r>
               <a:rPr lang="en-US" altLang="zh-CN"/>
-              <a:t>Configure Tomcat as Windows Service</a:t>
+              <a:t>Properties</a:t>
             </a:r>
             <a:endParaRPr lang="en-US" altLang="zh-CN"/>
           </a:p>
@@ -5848,7 +6135,15 @@
           <a:p>
             <a:r>
               <a:rPr lang="en-US" altLang="zh-CN"/>
-              <a:t>Run “bin/service.bat install”</a:t>
+              <a:t>References</a:t>
+            </a:r>
+            <a:endParaRPr lang="en-US" altLang="zh-CN"/>
+          </a:p>
+          <a:p>
+            <a:pPr lvl="1"/>
+            <a:r>
+              <a:rPr lang="en-US" altLang="zh-CN"/>
+              <a:t>https://javapointers.com/how-to/how-to-load-properties-using-apache-commons-configuration-2/</a:t>
             </a:r>
             <a:endParaRPr lang="en-US" altLang="zh-CN"/>
           </a:p>
@@ -5891,6 +6186,71 @@
           <a:p>
             <a:r>
               <a:rPr lang="en-US" altLang="zh-CN"/>
+              <a:t>Configure Tomcat as Windows Service</a:t>
+            </a:r>
+            <a:endParaRPr lang="en-US" altLang="zh-CN"/>
+          </a:p>
+        </p:txBody>
+      </p:sp>
+      <p:sp>
+        <p:nvSpPr>
+          <p:cNvPr id="3" name="内容占位符 2"/>
+          <p:cNvSpPr>
+            <a:spLocks noGrp="1"/>
+          </p:cNvSpPr>
+          <p:nvPr>
+            <p:ph idx="1"/>
+          </p:nvPr>
+        </p:nvSpPr>
+        <p:spPr/>
+        <p:txBody>
+          <a:bodyPr/>
+          <a:p>
+            <a:r>
+              <a:rPr lang="en-US" altLang="zh-CN"/>
+              <a:t>Run “bin/service.bat install”</a:t>
+            </a:r>
+            <a:endParaRPr lang="en-US" altLang="zh-CN"/>
+          </a:p>
+        </p:txBody>
+      </p:sp>
+    </p:spTree>
+    <p:custDataLst>
+      <p:tags r:id="rId1"/>
+    </p:custDataLst>
+  </p:cSld>
+  <p:clrMapOvr>
+    <a:masterClrMapping/>
+  </p:clrMapOvr>
+</p:sld>
+</file>
+
+<file path=ppt/slides/slide25.xml><?xml version="1.0" encoding="utf-8"?>
+<p:sld xmlns:a="http://schemas.openxmlformats.org/drawingml/2006/main" xmlns:r="http://schemas.openxmlformats.org/officeDocument/2006/relationships" xmlns:p="http://schemas.openxmlformats.org/presentationml/2006/main">
+  <p:cSld>
+    <p:spTree>
+      <p:nvGrpSpPr>
+        <p:cNvPr id="1" name=""/>
+        <p:cNvGrpSpPr/>
+        <p:nvPr/>
+      </p:nvGrpSpPr>
+      <p:grpSpPr/>
+      <p:sp>
+        <p:nvSpPr>
+          <p:cNvPr id="2" name="标题 1"/>
+          <p:cNvSpPr>
+            <a:spLocks noGrp="1"/>
+          </p:cNvSpPr>
+          <p:nvPr>
+            <p:ph type="title"/>
+          </p:nvPr>
+        </p:nvSpPr>
+        <p:spPr/>
+        <p:txBody>
+          <a:bodyPr/>
+          <a:p>
+            <a:r>
+              <a:rPr lang="en-US" altLang="zh-CN"/>
               <a:t>Send Email</a:t>
             </a:r>
             <a:endParaRPr lang="en-US" altLang="zh-CN"/>
@@ -5992,12 +6352,12 @@
         <p:spPr>
           <a:xfrm>
             <a:off x="838200" y="1211580"/>
-            <a:ext cx="6861175" cy="4549140"/>
+            <a:ext cx="5883910" cy="4549140"/>
           </a:xfrm>
         </p:spPr>
         <p:txBody>
           <a:bodyPr>
-            <a:normAutofit fontScale="90000" lnSpcReduction="20000"/>
+            <a:normAutofit fontScale="60000"/>
           </a:bodyPr>
           <a:p>
             <a:r>
@@ -6098,6 +6458,22 @@
             <a:endParaRPr lang="en-US" altLang="zh-CN" sz="2000"/>
           </a:p>
           <a:p>
+            <a:pPr lvl="2"/>
+            <a:r>
+              <a:rPr lang="zh-CN" altLang="en-US"/>
+              <a:t>只编译项目的源代码并将其输出到</a:t>
+            </a:r>
+            <a:r>
+              <a:rPr lang="en-US" altLang="zh-CN"/>
+              <a:t> target/classes </a:t>
+            </a:r>
+            <a:r>
+              <a:rPr lang="zh-CN" altLang="en-US"/>
+              <a:t>目录。它不会处理资源文件、测试代码或执行任何与打包相关的任务</a:t>
+            </a:r>
+            <a:endParaRPr lang="zh-CN" altLang="en-US"/>
+          </a:p>
+          <a:p>
             <a:pPr lvl="1"/>
             <a:r>
               <a:rPr lang="en-US" altLang="zh-CN" sz="2000"/>
@@ -6106,6 +6482,30 @@
             <a:endParaRPr lang="en-US" altLang="zh-CN" sz="2000"/>
           </a:p>
           <a:p>
+            <a:pPr lvl="2"/>
+            <a:r>
+              <a:rPr lang="zh-CN" altLang="en-US"/>
+              <a:t>不仅编译源代码还会处理资源文件并将项目打包成</a:t>
+            </a:r>
+            <a:r>
+              <a:rPr lang="en-US" altLang="zh-CN"/>
+              <a:t> JAR </a:t>
+            </a:r>
+            <a:r>
+              <a:rPr lang="zh-CN" altLang="en-US"/>
+              <a:t>或</a:t>
+            </a:r>
+            <a:r>
+              <a:rPr lang="en-US" altLang="zh-CN"/>
+              <a:t> WAR </a:t>
+            </a:r>
+            <a:r>
+              <a:rPr lang="zh-CN" altLang="en-US"/>
+              <a:t>文件</a:t>
+            </a:r>
+            <a:endParaRPr lang="zh-CN" altLang="en-US"/>
+          </a:p>
+          <a:p>
             <a:pPr lvl="1"/>
             <a:r>
               <a:rPr lang="en-US" altLang="zh-CN" sz="2000"/>
@@ -6123,7 +6523,11 @@
           </a:p>
           <a:p>
             <a:pPr lvl="1"/>
-            <a:endParaRPr lang="zh-CN" altLang="en-US"/>
+            <a:r>
+              <a:rPr lang="en-US" altLang="zh-CN"/>
+              <a:t>mvn dependency:tree</a:t>
+            </a:r>
+            <a:endParaRPr lang="en-US" altLang="zh-CN"/>
           </a:p>
         </p:txBody>
       </p:sp>
@@ -6971,6 +7375,14 @@
 </file>
 
 <file path=ppt/tags/tag30.xml><?xml version="1.0" encoding="utf-8"?>
+<p:tagLst xmlns:p="http://schemas.openxmlformats.org/presentationml/2006/main">
+  <p:tag name="KSO_WM_BEAUTIFY_FLAG" val="#wm#"/>
+  <p:tag name="KSO_WM_TEMPLATE_CATEGORY" val="custom"/>
+  <p:tag name="KSO_WM_TEMPLATE_INDEX" val="160402"/>
+</p:tagLst>
+</file>
+
+<file path=ppt/tags/tag31.xml><?xml version="1.0" encoding="utf-8"?>
 <p:tagLst xmlns:p="http://schemas.openxmlformats.org/presentationml/2006/main">
   <p:tag name="COMMONDATA" val="eyJoZGlkIjoiYjRhZjQ5NWVmZmQxNmM3NmNkNDYxNWRmNzNmMjA1ZDAifQ=="/>
   <p:tag name="KSO_WPP_MARK_KEY" val="3ca6f6e9-ac9b-4658-8d45-7b53fa102ed1"/>
